--- a/assets/figures-editable/c1-c2/c2-e07.pptx
+++ b/assets/figures-editable/c1-c2/c2-e07.pptx
@@ -7,7 +7,7 @@
   <p:sldIdLst>
     <p:sldId id="256" r:id="rId7"/>
   </p:sldIdLst>
-  <p:sldSz cx="11948160" cy="8095488" type="screen4x3"/>
+  <p:sldSz cx="12191695" cy="6858000" type="screen4x3"/>
   <p:notesSz cx="6858000" cy="9144000"/>
   <p:defaultTextStyle>
     <a:defPPr>
@@ -3098,14 +3098,14 @@
       <p:grpSpPr/>
       <p:sp>
         <p:nvSpPr>
-          <p:cNvPr id="2" name="text1" descr="sci-ppt:C2-E07-001"/>
+          <p:cNvPr id="2" name="C2-E07 text 0" descr="sci-ppt:o000"/>
           <p:cNvSpPr txBox="1"/>
           <p:nvPr/>
         </p:nvSpPr>
         <p:spPr>
           <a:xfrm>
-            <a:off x="316992" y="268224"/>
-            <a:ext cx="11277600" cy="359054"/>
+            <a:off x="274320" y="118872"/>
+            <a:ext cx="11612880" cy="340105"/>
           </a:xfrm>
           <a:prstGeom prst="rect">
             <a:avLst/>
@@ -3114,7 +3114,7 @@
           <a:effectLst/>
         </p:spPr>
         <p:txBody>
-          <a:bodyPr wrap="none" lIns="27432" rIns="27432" tIns="18288" bIns="18288" anchor="ctr">
+          <a:bodyPr wrap="none" lIns="18288" rIns="18288" tIns="18288" bIns="18288" anchor="t">
             <a:spAutoFit/>
           </a:bodyPr>
           <a:lstStyle/>
@@ -3125,35 +3125,543 @@
               </a:spcAft>
             </a:pPr>
             <a:r>
-              <a:rPr sz="1823" b="0" i="0">
+              <a:rPr sz="1900" b="1" i="0">
                 <a:solidFill>
                   <a:srgbClr val="8EDBD4"/>
                 </a:solidFill>
                 <a:latin typeface="Arial"/>
               </a:rPr>
-              <a:t>C2-E07 | Physical-variable diagram</a:t>
-            </a:r>
-          </a:p>
-        </p:txBody>
-      </p:sp>
-      <p:sp>
-        <p:nvSpPr>
-          <p:cNvPr id="3" name="rect2" descr="sci-ppt:C2-E07-002"/>
+              <a:t>C2-E07 · Reduced heat equation and Fourier constitutive law</a:t>
+            </a:r>
+          </a:p>
+        </p:txBody>
+      </p:sp>
+      <p:sp>
+        <p:nvSpPr>
+          <p:cNvPr id="3" name="C2-E07 round_rect 1" descr="sci-ppt:o001"/>
           <p:cNvSpPr/>
           <p:nvPr/>
         </p:nvSpPr>
         <p:spPr>
           <a:xfrm>
-            <a:off x="1219200" y="1524000"/>
-            <a:ext cx="3048000" cy="2438400"/>
+            <a:off x="365760" y="914400"/>
+            <a:ext cx="5852160" cy="4937760"/>
+          </a:xfrm>
+          <a:prstGeom prst="roundRect">
+            <a:avLst/>
+          </a:prstGeom>
+          <a:solidFill>
+            <a:srgbClr val="213E4B"/>
+          </a:solidFill>
+          <a:ln w="20320">
+            <a:solidFill>
+              <a:srgbClr val="8EDBD4"/>
+            </a:solidFill>
+          </a:ln>
+          <a:effectLst/>
+        </p:spPr>
+        <p:txBody>
+          <a:bodyPr rtlCol="0" anchor="ctr"/>
+          <a:lstStyle/>
+          <a:p>
+            <a:pPr algn="ctr"/>
+          </a:p>
+        </p:txBody>
+      </p:sp>
+      <p:sp>
+        <p:nvSpPr>
+          <p:cNvPr id="4" name="C2-E07 text 2" descr="sci-ppt:o002"/>
+          <p:cNvSpPr txBox="1"/>
+          <p:nvPr/>
+        </p:nvSpPr>
+        <p:spPr>
+          <a:xfrm>
+            <a:off x="475488" y="969264"/>
+            <a:ext cx="5632704" cy="254889"/>
+          </a:xfrm>
+          <a:prstGeom prst="rect">
+            <a:avLst/>
+          </a:prstGeom>
+          <a:noFill/>
+          <a:effectLst/>
+        </p:spPr>
+        <p:txBody>
+          <a:bodyPr wrap="none" lIns="18288" rIns="18288" tIns="18288" bIns="18288" anchor="t">
+            <a:spAutoFit/>
+          </a:bodyPr>
+          <a:lstStyle/>
+          <a:p>
+            <a:pPr algn="l">
+              <a:spcAft>
+                <a:spcPts val="0"/>
+              </a:spcAft>
+            </a:pPr>
+            <a:r>
+              <a:rPr sz="1350" b="1" i="0">
+                <a:solidFill>
+                  <a:srgbClr val="8EDBD4"/>
+                </a:solidFill>
+                <a:latin typeface="Arial"/>
+              </a:rPr>
+              <a:t>Energy balance of a small parcel</a:t>
+            </a:r>
+          </a:p>
+        </p:txBody>
+      </p:sp>
+      <p:sp>
+        <p:nvSpPr>
+          <p:cNvPr id="5" name="C2-E07 rect 3" descr="sci-ppt:o003"/>
+          <p:cNvSpPr/>
+          <p:nvPr/>
+        </p:nvSpPr>
+        <p:spPr>
+          <a:xfrm>
+            <a:off x="2286000" y="2468880"/>
+            <a:ext cx="2011680" cy="1463040"/>
           </a:xfrm>
           <a:prstGeom prst="rect">
             <a:avLst/>
           </a:prstGeom>
           <a:solidFill>
-            <a:srgbClr val="F6BC77"/>
+            <a:srgbClr val="2B6678">
+              <a:alpha val="90000"/>
+            </a:srgbClr>
           </a:solidFill>
-          <a:ln w="19050">
+          <a:ln w="30480">
+            <a:solidFill>
+              <a:srgbClr val="8EDBD4">
+                <a:alpha val="90000"/>
+              </a:srgbClr>
+            </a:solidFill>
+          </a:ln>
+          <a:effectLst/>
+        </p:spPr>
+        <p:txBody>
+          <a:bodyPr rtlCol="0" anchor="ctr"/>
+          <a:lstStyle/>
+          <a:p>
+            <a:pPr algn="ctr"/>
+          </a:p>
+        </p:txBody>
+      </p:sp>
+      <p:sp>
+        <p:nvSpPr>
+          <p:cNvPr id="6" name="C2-E07 text 4" descr="sci-ppt:o004"/>
+          <p:cNvSpPr txBox="1"/>
+          <p:nvPr/>
+        </p:nvSpPr>
+        <p:spPr>
+          <a:xfrm>
+            <a:off x="2286000" y="2926080"/>
+            <a:ext cx="2011680" cy="254889"/>
+          </a:xfrm>
+          <a:prstGeom prst="rect">
+            <a:avLst/>
+          </a:prstGeom>
+          <a:noFill/>
+          <a:effectLst/>
+        </p:spPr>
+        <p:txBody>
+          <a:bodyPr wrap="none" lIns="18288" rIns="18288" tIns="18288" bIns="18288" anchor="t">
+            <a:spAutoFit/>
+          </a:bodyPr>
+          <a:lstStyle/>
+          <a:p>
+            <a:pPr algn="ctr">
+              <a:spcAft>
+                <a:spcPts val="0"/>
+              </a:spcAft>
+            </a:pPr>
+            <a:r>
+              <a:rPr sz="1350" b="1" i="0">
+                <a:solidFill>
+                  <a:srgbClr val="E7F0F3"/>
+                </a:solidFill>
+                <a:latin typeface="Arial"/>
+              </a:rPr>
+              <a:t>ρ cₚ DT/Dt</a:t>
+            </a:r>
+          </a:p>
+        </p:txBody>
+      </p:sp>
+      <p:cxnSp>
+        <p:nvCxnSpPr>
+          <p:cNvPr id="7" name="C2-E07 arrow 5" descr="sci-ppt:o005"/>
+          <p:cNvCxnSpPr/>
+          <p:nvPr/>
+        </p:nvCxnSpPr>
+        <p:spPr>
+          <a:xfrm>
+            <a:off x="914400" y="3200400"/>
+            <a:ext cx="1325880" cy="0"/>
+          </a:xfrm>
+          <a:prstGeom prst="line">
+            <a:avLst/>
+          </a:prstGeom>
+          <a:ln w="44450">
+            <a:solidFill>
+              <a:srgbClr val="F28BA0"/>
+            </a:solidFill>
+            <a:headEnd type="none" w="med" len="med"/>
+            <a:tailEnd type="triangle" w="med" len="med"/>
+          </a:ln>
+          <a:effectLst/>
+        </p:spPr>
+      </p:cxnSp>
+      <p:sp>
+        <p:nvSpPr>
+          <p:cNvPr id="8" name="C2-E07 text 6" descr="sci-ppt:o006"/>
+          <p:cNvSpPr txBox="1"/>
+          <p:nvPr/>
+        </p:nvSpPr>
+        <p:spPr>
+          <a:xfrm>
+            <a:off x="502920" y="2743200"/>
+            <a:ext cx="1737360" cy="417576"/>
+          </a:xfrm>
+          <a:prstGeom prst="rect">
+            <a:avLst/>
+          </a:prstGeom>
+          <a:noFill/>
+          <a:effectLst/>
+        </p:spPr>
+        <p:txBody>
+          <a:bodyPr wrap="none" lIns="18288" rIns="18288" tIns="18288" bIns="18288" anchor="t">
+            <a:spAutoFit/>
+          </a:bodyPr>
+          <a:lstStyle/>
+          <a:p>
+            <a:pPr algn="ctr">
+              <a:spcAft>
+                <a:spcPts val="0"/>
+              </a:spcAft>
+            </a:pPr>
+            <a:r>
+              <a:rPr sz="1200" b="1" i="0">
+                <a:solidFill>
+                  <a:srgbClr val="F28BA0"/>
+                </a:solidFill>
+                <a:latin typeface="Arial"/>
+              </a:rPr>
+              <a:t>conduction in</a:t>
+            </a:r>
+          </a:p>
+          <a:p>
+            <a:pPr algn="ctr">
+              <a:spcAft>
+                <a:spcPts val="0"/>
+              </a:spcAft>
+            </a:pPr>
+            <a:r>
+              <a:rPr sz="1200" b="1" i="0">
+                <a:solidFill>
+                  <a:srgbClr val="F28BA0"/>
+                </a:solidFill>
+                <a:latin typeface="Arial"/>
+              </a:rPr>
+              <a:t>−∇·q</a:t>
+            </a:r>
+          </a:p>
+        </p:txBody>
+      </p:sp>
+      <p:cxnSp>
+        <p:nvCxnSpPr>
+          <p:cNvPr id="9" name="C2-E07 arrow 7" descr="sci-ppt:o007"/>
+          <p:cNvCxnSpPr/>
+          <p:nvPr/>
+        </p:nvCxnSpPr>
+        <p:spPr>
+          <a:xfrm>
+            <a:off x="4343400" y="3200400"/>
+            <a:ext cx="1325880" cy="0"/>
+          </a:xfrm>
+          <a:prstGeom prst="line">
+            <a:avLst/>
+          </a:prstGeom>
+          <a:ln w="44450">
+            <a:solidFill>
+              <a:srgbClr val="F28BA0"/>
+            </a:solidFill>
+            <a:headEnd type="none" w="med" len="med"/>
+            <a:tailEnd type="triangle" w="med" len="med"/>
+          </a:ln>
+          <a:effectLst/>
+        </p:spPr>
+      </p:cxnSp>
+      <p:sp>
+        <p:nvSpPr>
+          <p:cNvPr id="10" name="C2-E07 text 8" descr="sci-ppt:o008"/>
+          <p:cNvSpPr txBox="1"/>
+          <p:nvPr/>
+        </p:nvSpPr>
+        <p:spPr>
+          <a:xfrm>
+            <a:off x="4389120" y="2743200"/>
+            <a:ext cx="1737360" cy="231648"/>
+          </a:xfrm>
+          <a:prstGeom prst="rect">
+            <a:avLst/>
+          </a:prstGeom>
+          <a:noFill/>
+          <a:effectLst/>
+        </p:spPr>
+        <p:txBody>
+          <a:bodyPr wrap="none" lIns="18288" rIns="18288" tIns="18288" bIns="18288" anchor="t">
+            <a:spAutoFit/>
+          </a:bodyPr>
+          <a:lstStyle/>
+          <a:p>
+            <a:pPr algn="ctr">
+              <a:spcAft>
+                <a:spcPts val="0"/>
+              </a:spcAft>
+            </a:pPr>
+            <a:r>
+              <a:rPr sz="1200" b="0" i="0">
+                <a:solidFill>
+                  <a:srgbClr val="F28BA0"/>
+                </a:solidFill>
+                <a:latin typeface="Arial"/>
+              </a:rPr>
+              <a:t>conduction out</a:t>
+            </a:r>
+          </a:p>
+        </p:txBody>
+      </p:sp>
+      <p:cxnSp>
+        <p:nvCxnSpPr>
+          <p:cNvPr id="11" name="C2-E07 arrow 9" descr="sci-ppt:o009"/>
+          <p:cNvCxnSpPr/>
+          <p:nvPr/>
+        </p:nvCxnSpPr>
+        <p:spPr>
+          <a:xfrm>
+            <a:off x="3291840" y="1828800"/>
+            <a:ext cx="0" cy="594360"/>
+          </a:xfrm>
+          <a:prstGeom prst="line">
+            <a:avLst/>
+          </a:prstGeom>
+          <a:ln w="44450">
+            <a:solidFill>
+              <a:srgbClr val="F2B880"/>
+            </a:solidFill>
+            <a:headEnd type="none" w="med" len="med"/>
+            <a:tailEnd type="triangle" w="med" len="med"/>
+          </a:ln>
+          <a:effectLst/>
+        </p:spPr>
+      </p:cxnSp>
+      <p:sp>
+        <p:nvSpPr>
+          <p:cNvPr id="12" name="C2-E07 text 10" descr="sci-ppt:o010"/>
+          <p:cNvSpPr txBox="1"/>
+          <p:nvPr/>
+        </p:nvSpPr>
+        <p:spPr>
+          <a:xfrm>
+            <a:off x="2377440" y="1417320"/>
+            <a:ext cx="2194560" cy="231648"/>
+          </a:xfrm>
+          <a:prstGeom prst="rect">
+            <a:avLst/>
+          </a:prstGeom>
+          <a:noFill/>
+          <a:effectLst/>
+        </p:spPr>
+        <p:txBody>
+          <a:bodyPr wrap="none" lIns="18288" rIns="18288" tIns="18288" bIns="18288" anchor="t">
+            <a:spAutoFit/>
+          </a:bodyPr>
+          <a:lstStyle/>
+          <a:p>
+            <a:pPr algn="ctr">
+              <a:spcAft>
+                <a:spcPts val="0"/>
+              </a:spcAft>
+            </a:pPr>
+            <a:r>
+              <a:rPr sz="1200" b="1" i="0">
+                <a:solidFill>
+                  <a:srgbClr val="F2B880"/>
+                </a:solidFill>
+                <a:latin typeface="Arial"/>
+              </a:rPr>
+              <a:t>absorbed light Q_abs</a:t>
+            </a:r>
+          </a:p>
+        </p:txBody>
+      </p:sp>
+      <p:sp>
+        <p:nvSpPr>
+          <p:cNvPr id="13" name="C2-E07 text 11" descr="sci-ppt:o011"/>
+          <p:cNvSpPr txBox="1"/>
+          <p:nvPr/>
+        </p:nvSpPr>
+        <p:spPr>
+          <a:xfrm>
+            <a:off x="548640" y="4297680"/>
+            <a:ext cx="5486400" cy="254889"/>
+          </a:xfrm>
+          <a:prstGeom prst="rect">
+            <a:avLst/>
+          </a:prstGeom>
+          <a:noFill/>
+          <a:effectLst/>
+        </p:spPr>
+        <p:txBody>
+          <a:bodyPr wrap="none" lIns="18288" rIns="18288" tIns="18288" bIns="18288" anchor="t">
+            <a:spAutoFit/>
+          </a:bodyPr>
+          <a:lstStyle/>
+          <a:p>
+            <a:pPr algn="l">
+              <a:spcAft>
+                <a:spcPts val="0"/>
+              </a:spcAft>
+            </a:pPr>
+            <a:r>
+              <a:rPr sz="1350" b="1" i="0">
+                <a:solidFill>
+                  <a:srgbClr val="E7F0F3"/>
+                </a:solidFill>
+                <a:latin typeface="Arial"/>
+              </a:rPr>
+              <a:t>Stored heat rate  =  net conduction  +  optical source</a:t>
+            </a:r>
+          </a:p>
+        </p:txBody>
+      </p:sp>
+      <p:sp>
+        <p:nvSpPr>
+          <p:cNvPr id="14" name="C2-E07 text 12" descr="sci-ppt:o012"/>
+          <p:cNvSpPr txBox="1"/>
+          <p:nvPr/>
+        </p:nvSpPr>
+        <p:spPr>
+          <a:xfrm>
+            <a:off x="548640" y="4754880"/>
+            <a:ext cx="5486400" cy="239395"/>
+          </a:xfrm>
+          <a:prstGeom prst="rect">
+            <a:avLst/>
+          </a:prstGeom>
+          <a:noFill/>
+          <a:effectLst/>
+        </p:spPr>
+        <p:txBody>
+          <a:bodyPr wrap="none" lIns="18288" rIns="18288" tIns="18288" bIns="18288" anchor="t">
+            <a:spAutoFit/>
+          </a:bodyPr>
+          <a:lstStyle/>
+          <a:p>
+            <a:pPr algn="l">
+              <a:spcAft>
+                <a:spcPts val="0"/>
+              </a:spcAft>
+            </a:pPr>
+            <a:r>
+              <a:rPr sz="1250" b="0" i="0">
+                <a:solidFill>
+                  <a:srgbClr val="B4C7D2"/>
+                </a:solidFill>
+                <a:latin typeface="Arial"/>
+              </a:rPr>
+              <a:t>q = −k∇T (Fourier),   D/Dt = ∂/∂t + u·∇</a:t>
+            </a:r>
+          </a:p>
+        </p:txBody>
+      </p:sp>
+      <p:sp>
+        <p:nvSpPr>
+          <p:cNvPr id="15" name="C2-E07 round_rect 13" descr="sci-ppt:o013"/>
+          <p:cNvSpPr/>
+          <p:nvPr/>
+        </p:nvSpPr>
+        <p:spPr>
+          <a:xfrm>
+            <a:off x="6492240" y="914400"/>
+            <a:ext cx="5349240" cy="4937760"/>
+          </a:xfrm>
+          <a:prstGeom prst="roundRect">
+            <a:avLst/>
+          </a:prstGeom>
+          <a:solidFill>
+            <a:srgbClr val="213E4B"/>
+          </a:solidFill>
+          <a:ln w="20320">
+            <a:solidFill>
+              <a:srgbClr val="8EDBD4"/>
+            </a:solidFill>
+          </a:ln>
+          <a:effectLst/>
+        </p:spPr>
+        <p:txBody>
+          <a:bodyPr rtlCol="0" anchor="ctr"/>
+          <a:lstStyle/>
+          <a:p>
+            <a:pPr algn="ctr"/>
+          </a:p>
+        </p:txBody>
+      </p:sp>
+      <p:sp>
+        <p:nvSpPr>
+          <p:cNvPr id="16" name="C2-E07 text 14" descr="sci-ppt:o014"/>
+          <p:cNvSpPr txBox="1"/>
+          <p:nvPr/>
+        </p:nvSpPr>
+        <p:spPr>
+          <a:xfrm>
+            <a:off x="6601968" y="969264"/>
+            <a:ext cx="5129783" cy="254889"/>
+          </a:xfrm>
+          <a:prstGeom prst="rect">
+            <a:avLst/>
+          </a:prstGeom>
+          <a:noFill/>
+          <a:effectLst/>
+        </p:spPr>
+        <p:txBody>
+          <a:bodyPr wrap="none" lIns="18288" rIns="18288" tIns="18288" bIns="18288" anchor="t">
+            <a:spAutoFit/>
+          </a:bodyPr>
+          <a:lstStyle/>
+          <a:p>
+            <a:pPr algn="l">
+              <a:spcAft>
+                <a:spcPts val="0"/>
+              </a:spcAft>
+            </a:pPr>
+            <a:r>
+              <a:rPr sz="1350" b="1" i="0">
+                <a:solidFill>
+                  <a:srgbClr val="8EDBD4"/>
+                </a:solidFill>
+                <a:latin typeface="Arial"/>
+              </a:rPr>
+              <a:t>Two different heating jobs</a:t>
+            </a:r>
+          </a:p>
+        </p:txBody>
+      </p:sp>
+      <p:sp>
+        <p:nvSpPr>
+          <p:cNvPr id="17" name="C2-E07 rect 15" descr="sci-ppt:o015"/>
+          <p:cNvSpPr/>
+          <p:nvPr/>
+        </p:nvSpPr>
+        <p:spPr>
+          <a:xfrm>
+            <a:off x="6766560" y="1828800"/>
+            <a:ext cx="1463040" cy="3108960"/>
+          </a:xfrm>
+          <a:prstGeom prst="rect">
+            <a:avLst/>
+          </a:prstGeom>
+          <a:solidFill>
+            <a:srgbClr val="3A5362"/>
+          </a:solidFill>
+          <a:ln w="17780">
             <a:solidFill>
               <a:srgbClr val="B4C7D2"/>
             </a:solidFill>
@@ -3170,46 +3678,14 @@
       </p:sp>
       <p:sp>
         <p:nvSpPr>
-          <p:cNvPr id="4" name="rect3" descr="sci-ppt:C2-E07-003"/>
-          <p:cNvSpPr/>
-          <p:nvPr/>
-        </p:nvSpPr>
-        <p:spPr>
-          <a:xfrm>
-            <a:off x="4267200" y="1524000"/>
-            <a:ext cx="4876800" cy="2438400"/>
-          </a:xfrm>
-          <a:prstGeom prst="rect">
-            <a:avLst/>
-          </a:prstGeom>
-          <a:solidFill>
-            <a:srgbClr val="213E4B"/>
-          </a:solidFill>
-          <a:ln w="19050">
-            <a:solidFill>
-              <a:srgbClr val="B4C7D2"/>
-            </a:solidFill>
-          </a:ln>
-          <a:effectLst/>
-        </p:spPr>
-        <p:txBody>
-          <a:bodyPr rtlCol="0" anchor="ctr"/>
-          <a:lstStyle/>
-          <a:p>
-            <a:pPr algn="ctr"/>
-          </a:p>
-        </p:txBody>
-      </p:sp>
-      <p:sp>
-        <p:nvSpPr>
-          <p:cNvPr id="5" name="text4" descr="sci-ppt:C2-E07-004"/>
+          <p:cNvPr id="18" name="C2-E07 text 16" descr="sci-ppt:o016"/>
           <p:cNvSpPr txBox="1"/>
           <p:nvPr/>
         </p:nvSpPr>
         <p:spPr>
           <a:xfrm>
-            <a:off x="1524000" y="1828800"/>
-            <a:ext cx="3657600" cy="396849"/>
+            <a:off x="6766560" y="3108960"/>
+            <a:ext cx="1463040" cy="433070"/>
           </a:xfrm>
           <a:prstGeom prst="rect">
             <a:avLst/>
@@ -3218,7 +3694,175 @@
           <a:effectLst/>
         </p:spPr>
         <p:txBody>
-          <a:bodyPr wrap="none" lIns="27432" rIns="27432" tIns="18288" bIns="18288" anchor="ctr">
+          <a:bodyPr wrap="none" lIns="18288" rIns="18288" tIns="18288" bIns="18288" anchor="t">
+            <a:spAutoFit/>
+          </a:bodyPr>
+          <a:lstStyle/>
+          <a:p>
+            <a:pPr algn="ctr">
+              <a:spcAft>
+                <a:spcPts val="0"/>
+              </a:spcAft>
+            </a:pPr>
+            <a:r>
+              <a:rPr sz="1250" b="1" i="0">
+                <a:solidFill>
+                  <a:srgbClr val="F2B880"/>
+                </a:solidFill>
+                <a:latin typeface="Arial"/>
+              </a:rPr>
+              <a:t>absorber</a:t>
+            </a:r>
+          </a:p>
+          <a:p>
+            <a:pPr algn="ctr">
+              <a:spcAft>
+                <a:spcPts val="0"/>
+              </a:spcAft>
+            </a:pPr>
+            <a:r>
+              <a:rPr sz="1250" b="1" i="0">
+                <a:solidFill>
+                  <a:srgbClr val="F2B880"/>
+                </a:solidFill>
+                <a:latin typeface="Arial"/>
+              </a:rPr>
+              <a:t>Q_abs ≠ 0</a:t>
+            </a:r>
+          </a:p>
+        </p:txBody>
+      </p:sp>
+      <p:cxnSp>
+        <p:nvCxnSpPr>
+          <p:cNvPr id="19" name="C2-E07 arrow 17" descr="sci-ppt:o017"/>
+          <p:cNvCxnSpPr/>
+          <p:nvPr/>
+        </p:nvCxnSpPr>
+        <p:spPr>
+          <a:xfrm>
+            <a:off x="8275320" y="3383280"/>
+            <a:ext cx="777240" cy="0"/>
+          </a:xfrm>
+          <a:prstGeom prst="line">
+            <a:avLst/>
+          </a:prstGeom>
+          <a:ln w="44450">
+            <a:solidFill>
+              <a:srgbClr val="F28BA0"/>
+            </a:solidFill>
+            <a:headEnd type="none" w="med" len="med"/>
+            <a:tailEnd type="triangle" w="med" len="med"/>
+          </a:ln>
+          <a:effectLst/>
+        </p:spPr>
+      </p:cxnSp>
+      <p:sp>
+        <p:nvSpPr>
+          <p:cNvPr id="20" name="C2-E07 ellipse 18" descr="sci-ppt:o018"/>
+          <p:cNvSpPr/>
+          <p:nvPr/>
+        </p:nvSpPr>
+        <p:spPr>
+          <a:xfrm>
+            <a:off x="9235440" y="2468880"/>
+            <a:ext cx="1828800" cy="1828800"/>
+          </a:xfrm>
+          <a:prstGeom prst="ellipse">
+            <a:avLst/>
+          </a:prstGeom>
+          <a:solidFill>
+            <a:srgbClr val="1E4A5A"/>
+          </a:solidFill>
+          <a:ln w="27940">
+            <a:solidFill>
+              <a:srgbClr val="8EDBD4"/>
+            </a:solidFill>
+          </a:ln>
+          <a:effectLst/>
+        </p:spPr>
+        <p:txBody>
+          <a:bodyPr rtlCol="0" anchor="ctr"/>
+          <a:lstStyle/>
+          <a:p>
+            <a:pPr algn="ctr"/>
+          </a:p>
+        </p:txBody>
+      </p:sp>
+      <p:sp>
+        <p:nvSpPr>
+          <p:cNvPr id="21" name="C2-E07 text 19" descr="sci-ppt:o019"/>
+          <p:cNvSpPr txBox="1"/>
+          <p:nvPr/>
+        </p:nvSpPr>
+        <p:spPr>
+          <a:xfrm>
+            <a:off x="9326880" y="3246120"/>
+            <a:ext cx="1645920" cy="433070"/>
+          </a:xfrm>
+          <a:prstGeom prst="rect">
+            <a:avLst/>
+          </a:prstGeom>
+          <a:noFill/>
+          <a:effectLst/>
+        </p:spPr>
+        <p:txBody>
+          <a:bodyPr wrap="none" lIns="18288" rIns="18288" tIns="18288" bIns="18288" anchor="t">
+            <a:spAutoFit/>
+          </a:bodyPr>
+          <a:lstStyle/>
+          <a:p>
+            <a:pPr algn="ctr">
+              <a:spcAft>
+                <a:spcPts val="0"/>
+              </a:spcAft>
+            </a:pPr>
+            <a:r>
+              <a:rPr sz="1250" b="1" i="0">
+                <a:solidFill>
+                  <a:srgbClr val="8EDBD4"/>
+                </a:solidFill>
+                <a:latin typeface="Arial"/>
+              </a:rPr>
+              <a:t>PFC</a:t>
+            </a:r>
+          </a:p>
+          <a:p>
+            <a:pPr algn="ctr">
+              <a:spcAft>
+                <a:spcPts val="0"/>
+              </a:spcAft>
+            </a:pPr>
+            <a:r>
+              <a:rPr sz="1250" b="1" i="0">
+                <a:solidFill>
+                  <a:srgbClr val="8EDBD4"/>
+                </a:solidFill>
+                <a:latin typeface="Arial"/>
+              </a:rPr>
+              <a:t>Q_abs = 0</a:t>
+            </a:r>
+          </a:p>
+        </p:txBody>
+      </p:sp>
+      <p:sp>
+        <p:nvSpPr>
+          <p:cNvPr id="22" name="C2-E07 text 20" descr="sci-ppt:o020"/>
+          <p:cNvSpPr txBox="1"/>
+          <p:nvPr/>
+        </p:nvSpPr>
+        <p:spPr>
+          <a:xfrm>
+            <a:off x="6675120" y="5074920"/>
+            <a:ext cx="5029200" cy="433070"/>
+          </a:xfrm>
+          <a:prstGeom prst="rect">
+            <a:avLst/>
+          </a:prstGeom>
+          <a:noFill/>
+          <a:effectLst/>
+        </p:spPr>
+        <p:txBody>
+          <a:bodyPr wrap="none" lIns="18288" rIns="18288" tIns="18288" bIns="18288" anchor="t">
             <a:spAutoFit/>
           </a:bodyPr>
           <a:lstStyle/>
@@ -3229,27 +3873,43 @@
               </a:spcAft>
             </a:pPr>
             <a:r>
-              <a:rPr sz="2016" b="0" i="0">
+              <a:rPr sz="1250" b="0" i="0">
                 <a:solidFill>
-                  <a:srgbClr val="142632"/>
+                  <a:srgbClr val="E7F0F3"/>
                 </a:solidFill>
                 <a:latin typeface="Arial"/>
               </a:rPr>
-              <a:t>Absorber / side A</a:t>
-            </a:r>
-          </a:p>
-        </p:txBody>
-      </p:sp>
-      <p:sp>
-        <p:nvSpPr>
-          <p:cNvPr id="6" name="text5" descr="sci-ppt:C2-E07-005"/>
+              <a:t>Heating the absorber and heating the PFC are separate steps</a:t>
+            </a:r>
+          </a:p>
+          <a:p>
+            <a:pPr algn="l">
+              <a:spcAft>
+                <a:spcPts val="0"/>
+              </a:spcAft>
+            </a:pPr>
+            <a:r>
+              <a:rPr sz="1250" b="0" i="0">
+                <a:solidFill>
+                  <a:srgbClr val="E7F0F3"/>
+                </a:solidFill>
+                <a:latin typeface="Arial"/>
+              </a:rPr>
+              <a:t>joined only by conduction across the contact.</a:t>
+            </a:r>
+          </a:p>
+        </p:txBody>
+      </p:sp>
+      <p:sp>
+        <p:nvSpPr>
+          <p:cNvPr id="23" name="C2-E07 text 21" descr="sci-ppt:o021"/>
           <p:cNvSpPr txBox="1"/>
           <p:nvPr/>
         </p:nvSpPr>
         <p:spPr>
           <a:xfrm>
-            <a:off x="5669280" y="1828800"/>
-            <a:ext cx="3657600" cy="396849"/>
+            <a:off x="320040" y="6510528"/>
+            <a:ext cx="11521440" cy="200660"/>
           </a:xfrm>
           <a:prstGeom prst="rect">
             <a:avLst/>
@@ -3258,7 +3918,7 @@
           <a:effectLst/>
         </p:spPr>
         <p:txBody>
-          <a:bodyPr wrap="none" lIns="27432" rIns="27432" tIns="18288" bIns="18288" anchor="ctr">
+          <a:bodyPr wrap="none" lIns="18288" rIns="18288" tIns="18288" bIns="18288" anchor="t">
             <a:spAutoFit/>
           </a:bodyPr>
           <a:lstStyle/>
@@ -3269,557 +3929,13 @@
               </a:spcAft>
             </a:pPr>
             <a:r>
-              <a:rPr sz="2016" b="0" i="0">
-                <a:solidFill>
-                  <a:srgbClr val="E7F0F3"/>
-                </a:solidFill>
-                <a:latin typeface="Arial"/>
-              </a:rPr>
-              <a:t>PFC / side B</a:t>
-            </a:r>
-          </a:p>
-        </p:txBody>
-      </p:sp>
-      <p:cxnSp>
-        <p:nvCxnSpPr>
-          <p:cNvPr id="7" name="arrow6" descr="sci-ppt:C2-E07-006"/>
-          <p:cNvCxnSpPr/>
-          <p:nvPr/>
-        </p:nvCxnSpPr>
-        <p:spPr>
-          <a:xfrm>
-            <a:off x="3048000" y="2865120"/>
-            <a:ext cx="3291840" cy="0"/>
-          </a:xfrm>
-          <a:prstGeom prst="line">
-            <a:avLst/>
-          </a:prstGeom>
-          <a:ln w="25400">
-            <a:solidFill>
-              <a:srgbClr val="8EDBD4"/>
-            </a:solidFill>
-            <a:headEnd type="none" w="med" len="med"/>
-            <a:tailEnd type="triangle" w="med" len="med"/>
-          </a:ln>
-          <a:effectLst/>
-        </p:spPr>
-      </p:cxnSp>
-      <p:sp>
-        <p:nvSpPr>
-          <p:cNvPr id="8" name="text7" descr="sci-ppt:C2-E07-007"/>
-          <p:cNvSpPr txBox="1"/>
-          <p:nvPr/>
-        </p:nvSpPr>
-        <p:spPr>
-          <a:xfrm>
-            <a:off x="4632960" y="3169920"/>
-            <a:ext cx="4876800" cy="359054"/>
-          </a:xfrm>
-          <a:prstGeom prst="rect">
-            <a:avLst/>
-          </a:prstGeom>
-          <a:noFill/>
-          <a:effectLst/>
-        </p:spPr>
-        <p:txBody>
-          <a:bodyPr wrap="none" lIns="27432" rIns="27432" tIns="18288" bIns="18288" anchor="ctr">
-            <a:spAutoFit/>
-          </a:bodyPr>
-          <a:lstStyle/>
-          <a:p>
-            <a:pPr algn="l">
-              <a:spcAft>
-                <a:spcPts val="0"/>
-              </a:spcAft>
-            </a:pPr>
-            <a:r>
-              <a:rPr sz="1823" b="0" i="0">
-                <a:solidFill>
-                  <a:srgbClr val="E7F0F3"/>
-                </a:solidFill>
-                <a:latin typeface="Arial"/>
-              </a:rPr>
-              <a:t>q; normal A → B</a:t>
-            </a:r>
-          </a:p>
-        </p:txBody>
-      </p:sp>
-      <p:sp>
-        <p:nvSpPr>
-          <p:cNvPr id="9" name="text8" descr="sci-ppt:C2-E07-008"/>
-          <p:cNvSpPr txBox="1"/>
-          <p:nvPr/>
-        </p:nvSpPr>
-        <p:spPr>
-          <a:xfrm>
-            <a:off x="1219200" y="1097280"/>
-            <a:ext cx="1828800" cy="377952"/>
-          </a:xfrm>
-          <a:prstGeom prst="rect">
-            <a:avLst/>
-          </a:prstGeom>
-          <a:noFill/>
-          <a:effectLst/>
-        </p:spPr>
-        <p:txBody>
-          <a:bodyPr wrap="none" lIns="27432" rIns="27432" tIns="18288" bIns="18288" anchor="ctr">
-            <a:spAutoFit/>
-          </a:bodyPr>
-          <a:lstStyle/>
-          <a:p>
-            <a:pPr algn="l">
-              <a:spcAft>
-                <a:spcPts val="0"/>
-              </a:spcAft>
-            </a:pPr>
-            <a:r>
-              <a:rPr sz="1920" b="0" i="0">
-                <a:solidFill>
-                  <a:srgbClr val="E7F0F3"/>
-                </a:solidFill>
-                <a:latin typeface="Arial"/>
-              </a:rPr>
-              <a:t>T_A</a:t>
-            </a:r>
-          </a:p>
-        </p:txBody>
-      </p:sp>
-      <p:sp>
-        <p:nvSpPr>
-          <p:cNvPr id="10" name="text9" descr="sci-ppt:C2-E07-009"/>
-          <p:cNvSpPr txBox="1"/>
-          <p:nvPr/>
-        </p:nvSpPr>
-        <p:spPr>
-          <a:xfrm>
-            <a:off x="7071360" y="1097280"/>
-            <a:ext cx="1828800" cy="377952"/>
-          </a:xfrm>
-          <a:prstGeom prst="rect">
-            <a:avLst/>
-          </a:prstGeom>
-          <a:noFill/>
-          <a:effectLst/>
-        </p:spPr>
-        <p:txBody>
-          <a:bodyPr wrap="none" lIns="27432" rIns="27432" tIns="18288" bIns="18288" anchor="ctr">
-            <a:spAutoFit/>
-          </a:bodyPr>
-          <a:lstStyle/>
-          <a:p>
-            <a:pPr algn="l">
-              <a:spcAft>
-                <a:spcPts val="0"/>
-              </a:spcAft>
-            </a:pPr>
-            <a:r>
-              <a:rPr sz="1920" b="0" i="0">
-                <a:solidFill>
-                  <a:srgbClr val="E7F0F3"/>
-                </a:solidFill>
-                <a:latin typeface="Arial"/>
-              </a:rPr>
-              <a:t>T_B</a:t>
-            </a:r>
-          </a:p>
-        </p:txBody>
-      </p:sp>
-      <p:sp>
-        <p:nvSpPr>
-          <p:cNvPr id="11" name="text10" descr="sci-ppt:C2-E07-010"/>
-          <p:cNvSpPr txBox="1"/>
-          <p:nvPr/>
-        </p:nvSpPr>
-        <p:spPr>
-          <a:xfrm>
-            <a:off x="1402080" y="4206240"/>
-            <a:ext cx="10363200" cy="340156"/>
-          </a:xfrm>
-          <a:prstGeom prst="rect">
-            <a:avLst/>
-          </a:prstGeom>
-          <a:noFill/>
-          <a:effectLst/>
-        </p:spPr>
-        <p:txBody>
-          <a:bodyPr wrap="none" lIns="27432" rIns="27432" tIns="18288" bIns="18288" anchor="ctr">
-            <a:spAutoFit/>
-          </a:bodyPr>
-          <a:lstStyle/>
-          <a:p>
-            <a:pPr algn="l">
-              <a:spcAft>
-                <a:spcPts val="0"/>
-              </a:spcAft>
-            </a:pPr>
-            <a:r>
-              <a:rPr sz="1728" b="0" i="0">
-                <a:solidFill>
-                  <a:srgbClr val="E7F0F3"/>
-                </a:solidFill>
-                <a:latin typeface="Arial"/>
-              </a:rPr>
-              <a:t>Thermal path and contact are distinct from optical deposition.</a:t>
-            </a:r>
-          </a:p>
-        </p:txBody>
-      </p:sp>
-      <p:sp>
-        <p:nvSpPr>
-          <p:cNvPr id="12" name="text11" descr="sci-ppt:C2-E07-011"/>
-          <p:cNvSpPr txBox="1"/>
-          <p:nvPr/>
-        </p:nvSpPr>
-        <p:spPr>
-          <a:xfrm>
-            <a:off x="365760" y="4974336"/>
-            <a:ext cx="5547360" cy="321259"/>
-          </a:xfrm>
-          <a:prstGeom prst="rect">
-            <a:avLst/>
-          </a:prstGeom>
-          <a:noFill/>
-          <a:effectLst/>
-        </p:spPr>
-        <p:txBody>
-          <a:bodyPr wrap="none" lIns="27432" rIns="27432" tIns="18288" bIns="18288" anchor="ctr">
-            <a:spAutoFit/>
-          </a:bodyPr>
-          <a:lstStyle/>
-          <a:p>
-            <a:pPr algn="l">
-              <a:spcAft>
-                <a:spcPts val="0"/>
-              </a:spcAft>
-            </a:pPr>
-            <a:r>
-              <a:rPr sz="1632" b="0" i="0">
-                <a:solidFill>
-                  <a:srgbClr val="E7F0F3"/>
-                </a:solidFill>
-                <a:latin typeface="Arial"/>
-              </a:rPr>
-              <a:t>T: core temperature field</a:t>
-            </a:r>
-          </a:p>
-        </p:txBody>
-      </p:sp>
-      <p:sp>
-        <p:nvSpPr>
-          <p:cNvPr id="13" name="text12" descr="sci-ppt:C2-E07-012"/>
-          <p:cNvSpPr txBox="1"/>
-          <p:nvPr/>
-        </p:nvSpPr>
-        <p:spPr>
-          <a:xfrm>
-            <a:off x="365760" y="5266944"/>
-            <a:ext cx="5547360" cy="321259"/>
-          </a:xfrm>
-          <a:prstGeom prst="rect">
-            <a:avLst/>
-          </a:prstGeom>
-          <a:noFill/>
-          <a:effectLst/>
-        </p:spPr>
-        <p:txBody>
-          <a:bodyPr wrap="none" lIns="27432" rIns="27432" tIns="18288" bIns="18288" anchor="ctr">
-            <a:spAutoFit/>
-          </a:bodyPr>
-          <a:lstStyle/>
-          <a:p>
-            <a:pPr algn="l">
-              <a:spcAft>
-                <a:spcPts val="0"/>
-              </a:spcAft>
-            </a:pPr>
-            <a:r>
-              <a:rPr sz="1632" b="0" i="0">
-                <a:solidFill>
-                  <a:srgbClr val="E7F0F3"/>
-                </a:solidFill>
-                <a:latin typeface="Arial"/>
-              </a:rPr>
-              <a:t>k, q: conduction toward colder material</a:t>
-            </a:r>
-          </a:p>
-        </p:txBody>
-      </p:sp>
-      <p:sp>
-        <p:nvSpPr>
-          <p:cNvPr id="14" name="text13" descr="sci-ppt:C2-E07-013"/>
-          <p:cNvSpPr txBox="1"/>
-          <p:nvPr/>
-        </p:nvSpPr>
-        <p:spPr>
-          <a:xfrm>
-            <a:off x="365760" y="5559552"/>
-            <a:ext cx="5547360" cy="321259"/>
-          </a:xfrm>
-          <a:prstGeom prst="rect">
-            <a:avLst/>
-          </a:prstGeom>
-          <a:noFill/>
-          <a:effectLst/>
-        </p:spPr>
-        <p:txBody>
-          <a:bodyPr wrap="none" lIns="27432" rIns="27432" tIns="18288" bIns="18288" anchor="ctr">
-            <a:spAutoFit/>
-          </a:bodyPr>
-          <a:lstStyle/>
-          <a:p>
-            <a:pPr algn="l">
-              <a:spcAft>
-                <a:spcPts val="0"/>
-              </a:spcAft>
-            </a:pPr>
-            <a:r>
-              <a:rPr sz="1632" b="0" i="0">
-                <a:solidFill>
-                  <a:srgbClr val="E7F0F3"/>
-                </a:solidFill>
-                <a:latin typeface="Arial"/>
-              </a:rPr>
-              <a:t>Q_abs: absorber heating</a:t>
-            </a:r>
-          </a:p>
-        </p:txBody>
-      </p:sp>
-      <p:sp>
-        <p:nvSpPr>
-          <p:cNvPr id="15" name="text14" descr="sci-ppt:C2-E07-014"/>
-          <p:cNvSpPr txBox="1"/>
-          <p:nvPr/>
-        </p:nvSpPr>
-        <p:spPr>
-          <a:xfrm>
-            <a:off x="365760" y="5852160"/>
-            <a:ext cx="5547360" cy="321259"/>
-          </a:xfrm>
-          <a:prstGeom prst="rect">
-            <a:avLst/>
-          </a:prstGeom>
-          <a:noFill/>
-          <a:effectLst/>
-        </p:spPr>
-        <p:txBody>
-          <a:bodyPr wrap="none" lIns="27432" rIns="27432" tIns="18288" bIns="18288" anchor="ctr">
-            <a:spAutoFit/>
-          </a:bodyPr>
-          <a:lstStyle/>
-          <a:p>
-            <a:pPr algn="l">
-              <a:spcAft>
-                <a:spcPts val="0"/>
-              </a:spcAft>
-            </a:pPr>
-            <a:r>
-              <a:rPr sz="1632" b="0" i="0">
-                <a:solidFill>
-                  <a:srgbClr val="E7F0F3"/>
-                </a:solidFill>
-                <a:latin typeface="Arial"/>
-              </a:rPr>
-              <a:t>∇, ∇·: spatial variation</a:t>
-            </a:r>
-          </a:p>
-        </p:txBody>
-      </p:sp>
-      <p:sp>
-        <p:nvSpPr>
-          <p:cNvPr id="16" name="text15" descr="sci-ppt:C2-E07-015"/>
-          <p:cNvSpPr txBox="1"/>
-          <p:nvPr/>
-        </p:nvSpPr>
-        <p:spPr>
-          <a:xfrm>
-            <a:off x="6156960" y="4974336"/>
-            <a:ext cx="5547360" cy="321259"/>
-          </a:xfrm>
-          <a:prstGeom prst="rect">
-            <a:avLst/>
-          </a:prstGeom>
-          <a:noFill/>
-          <a:effectLst/>
-        </p:spPr>
-        <p:txBody>
-          <a:bodyPr wrap="none" lIns="27432" rIns="27432" tIns="18288" bIns="18288" anchor="ctr">
-            <a:spAutoFit/>
-          </a:bodyPr>
-          <a:lstStyle/>
-          <a:p>
-            <a:pPr algn="l">
-              <a:spcAft>
-                <a:spcPts val="0"/>
-              </a:spcAft>
-            </a:pPr>
-            <a:r>
-              <a:rPr sz="1632" b="0" i="0">
-                <a:solidFill>
-                  <a:srgbClr val="E7F0F3"/>
-                </a:solidFill>
-                <a:latin typeface="Arial"/>
-              </a:rPr>
-              <a:t>ρ, c_p: stored sensible energy</a:t>
-            </a:r>
-          </a:p>
-        </p:txBody>
-      </p:sp>
-      <p:sp>
-        <p:nvSpPr>
-          <p:cNvPr id="17" name="text16" descr="sci-ppt:C2-E07-016"/>
-          <p:cNvSpPr txBox="1"/>
-          <p:nvPr/>
-        </p:nvSpPr>
-        <p:spPr>
-          <a:xfrm>
-            <a:off x="6156960" y="5266944"/>
-            <a:ext cx="5547360" cy="321259"/>
-          </a:xfrm>
-          <a:prstGeom prst="rect">
-            <a:avLst/>
-          </a:prstGeom>
-          <a:noFill/>
-          <a:effectLst/>
-        </p:spPr>
-        <p:txBody>
-          <a:bodyPr wrap="none" lIns="27432" rIns="27432" tIns="18288" bIns="18288" anchor="ctr">
-            <a:spAutoFit/>
-          </a:bodyPr>
-          <a:lstStyle/>
-          <a:p>
-            <a:pPr algn="l">
-              <a:spcAft>
-                <a:spcPts val="0"/>
-              </a:spcAft>
-            </a:pPr>
-            <a:r>
-              <a:rPr sz="1632" b="0" i="0">
-                <a:solidFill>
-                  <a:srgbClr val="E7F0F3"/>
-                </a:solidFill>
-                <a:latin typeface="Arial"/>
-              </a:rPr>
-              <a:t>u: parcel advection</a:t>
-            </a:r>
-          </a:p>
-        </p:txBody>
-      </p:sp>
-      <p:sp>
-        <p:nvSpPr>
-          <p:cNvPr id="18" name="text17" descr="sci-ppt:C2-E07-017"/>
-          <p:cNvSpPr txBox="1"/>
-          <p:nvPr/>
-        </p:nvSpPr>
-        <p:spPr>
-          <a:xfrm>
-            <a:off x="6156960" y="5559552"/>
-            <a:ext cx="5547360" cy="321259"/>
-          </a:xfrm>
-          <a:prstGeom prst="rect">
-            <a:avLst/>
-          </a:prstGeom>
-          <a:noFill/>
-          <a:effectLst/>
-        </p:spPr>
-        <p:txBody>
-          <a:bodyPr wrap="none" lIns="27432" rIns="27432" tIns="18288" bIns="18288" anchor="ctr">
-            <a:spAutoFit/>
-          </a:bodyPr>
-          <a:lstStyle/>
-          <a:p>
-            <a:pPr algn="l">
-              <a:spcAft>
-                <a:spcPts val="0"/>
-              </a:spcAft>
-            </a:pPr>
-            <a:r>
-              <a:rPr sz="1632" b="0" i="0">
-                <a:solidFill>
-                  <a:srgbClr val="E7F0F3"/>
-                </a:solidFill>
-                <a:latin typeface="Arial"/>
-              </a:rPr>
-              <a:t>t, D/Dt, ∂_t: time changes</a:t>
-            </a:r>
-          </a:p>
-        </p:txBody>
-      </p:sp>
-      <p:sp>
-        <p:nvSpPr>
-          <p:cNvPr id="19" name="text18" descr="sci-ppt:C2-E07-018"/>
-          <p:cNvSpPr txBox="1"/>
-          <p:nvPr/>
-        </p:nvSpPr>
-        <p:spPr>
-          <a:xfrm>
-            <a:off x="365760" y="6339840"/>
-            <a:ext cx="11277600" cy="302361"/>
-          </a:xfrm>
-          <a:prstGeom prst="rect">
-            <a:avLst/>
-          </a:prstGeom>
-          <a:noFill/>
-          <a:effectLst/>
-        </p:spPr>
-        <p:txBody>
-          <a:bodyPr wrap="none" lIns="27432" rIns="27432" tIns="18288" bIns="18288" anchor="ctr">
-            <a:spAutoFit/>
-          </a:bodyPr>
-          <a:lstStyle/>
-          <a:p>
-            <a:pPr algn="l">
-              <a:spcAft>
-                <a:spcPts val="0"/>
-              </a:spcAft>
-            </a:pPr>
-            <a:r>
-              <a:rPr sz="1536" b="0" i="0">
+              <a:rPr sz="1000" b="0" i="0">
                 <a:solidFill>
                   <a:srgbClr val="B4C7D2"/>
                 </a:solidFill>
                 <a:latin typeface="Arial"/>
               </a:rPr>
-              <a:t>Absorber and PFC can occupy different locations</a:t>
-            </a:r>
-          </a:p>
-        </p:txBody>
-      </p:sp>
-      <p:sp>
-        <p:nvSpPr>
-          <p:cNvPr id="20" name="text19" descr="sci-ppt:C2-E07-019"/>
-          <p:cNvSpPr txBox="1"/>
-          <p:nvPr/>
-        </p:nvSpPr>
-        <p:spPr>
-          <a:xfrm>
-            <a:off x="365760" y="6632448"/>
-            <a:ext cx="11277600" cy="302361"/>
-          </a:xfrm>
-          <a:prstGeom prst="rect">
-            <a:avLst/>
-          </a:prstGeom>
-          <a:noFill/>
-          <a:effectLst/>
-        </p:spPr>
-        <p:txBody>
-          <a:bodyPr wrap="none" lIns="27432" rIns="27432" tIns="18288" bIns="18288" anchor="ctr">
-            <a:spAutoFit/>
-          </a:bodyPr>
-          <a:lstStyle/>
-          <a:p>
-            <a:pPr algn="l">
-              <a:spcAft>
-                <a:spcPts val="0"/>
-              </a:spcAft>
-            </a:pPr>
-            <a:r>
-              <a:rPr sz="1536" b="0" i="0">
-                <a:solidFill>
-                  <a:srgbClr val="B4C7D2"/>
-                </a:solidFill>
-                <a:latin typeface="Arial"/>
-              </a:rPr>
-              <a:t>This equation precedes phase change; latent transfer is added at the interface</a:t>
+              <a:t>Reduced heat equation of Eq. C2-E07; sketch of the heat path.</a:t>
             </a:r>
           </a:p>
         </p:txBody>
